--- a/WorkStuff/Courses/Git/Git_General_Training_Lab/Git_General_Training_GitHub.pptx
+++ b/WorkStuff/Courses/Git/Git_General_Training_Lab/Git_General_Training_GitHub.pptx
@@ -20782,7 +20782,7 @@
             </a:pPr>
             <a:r>
               <a:rPr lang="en-US" sz="4000" dirty="0"/>
-              <a:t>What does the word Git mean?</a:t>
+              <a:t>What does the word git mean?</a:t>
             </a:r>
           </a:p>
         </p:txBody>
@@ -21871,7 +21871,7 @@
           <a:p>
             <a:r>
               <a:rPr lang="en-US" dirty="0"/>
-              <a:t>About myself: Ilya Rokhkin </a:t>
+              <a:t>About myself: Ilya Rokhkin – DevOps engineer </a:t>
             </a:r>
             <a:br>
               <a:rPr lang="en-US" dirty="0"/>
